--- a/chapter 25.pptx
+++ b/chapter 25.pptx
@@ -244,7 +244,7 @@
           <a:p>
             <a:fld id="{13928E3B-7122-43E6-B3BB-09448C56C96C}" type="datetimeFigureOut">
               <a:rPr lang="en-US" smtClean="0"/>
-              <a:t>25/07/20</a:t>
+              <a:t>25/07/24</a:t>
             </a:fld>
             <a:endParaRPr lang="en-US" dirty="0"/>
           </a:p>
@@ -422,7 +422,7 @@
           <a:p>
             <a:fld id="{B98C9CAF-43DF-44BF-8016-DC193E4E594B}" type="datetimeFigureOut">
               <a:rPr lang="en-US" smtClean="0"/>
-              <a:t>25/07/20</a:t>
+              <a:t>25/07/24</a:t>
             </a:fld>
             <a:endParaRPr lang="en-US" dirty="0"/>
           </a:p>
@@ -4673,7 +4673,22 @@
           <a:bodyPr/>
           <a:lstStyle/>
           <a:p>
-            <a:endParaRPr lang="en-US"/>
+            <a:r>
+              <a:rPr lang="en-US" dirty="0"/>
+              <a:t>In the same way that an architecture is much more than a technical “blueprint” for a system, an architect is much more than a designer of an architecture.</a:t>
+            </a:r>
+          </a:p>
+          <a:p>
+            <a:r>
+              <a:rPr lang="en-US" dirty="0"/>
+              <a:t>This has led us to try to understand what an architect and an architecture-centric organization must do to succeed.</a:t>
+            </a:r>
+          </a:p>
+          <a:p>
+            <a:r>
+              <a:rPr lang="en-US" dirty="0"/>
+              <a:t> An architect must carry out the duties, hone the skills, and continuously acquire the knowledge necessary to be successful. The key to becoming a good and then a better architect is continuous learning, mentoring, and being mentored.</a:t>
+            </a:r>
           </a:p>
         </p:txBody>
       </p:sp>
@@ -5003,6 +5018,62 @@
         <p:txBody>
           <a:bodyPr/>
           <a:lstStyle/>
+          <a:p>
+            <a:r>
+              <a:rPr lang="en-US" dirty="0"/>
+              <a:t>Introduction</a:t>
+            </a:r>
+          </a:p>
+          <a:p>
+            <a:r>
+              <a:rPr lang="en-US" dirty="0"/>
+              <a:t>Architecture Competence</a:t>
+            </a:r>
+          </a:p>
+          <a:p>
+            <a:pPr lvl="1"/>
+            <a:r>
+              <a:rPr lang="en-US" dirty="0"/>
+              <a:t>Duties</a:t>
+            </a:r>
+          </a:p>
+          <a:p>
+            <a:pPr lvl="1"/>
+            <a:r>
+              <a:rPr lang="en-US" dirty="0"/>
+              <a:t>Skills</a:t>
+            </a:r>
+          </a:p>
+          <a:p>
+            <a:pPr lvl="1"/>
+            <a:r>
+              <a:rPr lang="en-US" dirty="0"/>
+              <a:t>Knowledge</a:t>
+            </a:r>
+          </a:p>
+          <a:p>
+            <a:r>
+              <a:rPr lang="en-US" dirty="0"/>
+              <a:t>Organizational Architectural Competence</a:t>
+            </a:r>
+          </a:p>
+          <a:p>
+            <a:r>
+              <a:rPr lang="en-US" dirty="0"/>
+              <a:t>Summary</a:t>
+            </a:r>
+          </a:p>
+          <a:p>
+            <a:endParaRPr lang="en-US" dirty="0"/>
+          </a:p>
+          <a:p>
+            <a:pPr lvl="1"/>
+            <a:endParaRPr lang="en-US" dirty="0"/>
+          </a:p>
+          <a:p>
+            <a:pPr lvl="1"/>
+            <a:endParaRPr lang="en-US" dirty="0"/>
+          </a:p>
           <a:p>
             <a:endParaRPr lang="en-US" dirty="0"/>
           </a:p>

--- a/chapter 25.pptx
+++ b/chapter 25.pptx
@@ -5,10 +5,10 @@
     <p:sldMasterId id="2147483648" r:id="rId1"/>
   </p:sldMasterIdLst>
   <p:notesMasterIdLst>
-    <p:notesMasterId r:id="rId21"/>
+    <p:notesMasterId r:id="rId22"/>
   </p:notesMasterIdLst>
   <p:handoutMasterIdLst>
-    <p:handoutMasterId r:id="rId22"/>
+    <p:handoutMasterId r:id="rId23"/>
   </p:handoutMasterIdLst>
   <p:sldIdLst>
     <p:sldId id="259" r:id="rId2"/>
@@ -17,19 +17,20 @@
     <p:sldId id="266" r:id="rId5"/>
     <p:sldId id="290" r:id="rId6"/>
     <p:sldId id="291" r:id="rId7"/>
-    <p:sldId id="292" r:id="rId8"/>
-    <p:sldId id="293" r:id="rId9"/>
-    <p:sldId id="294" r:id="rId10"/>
-    <p:sldId id="295" r:id="rId11"/>
-    <p:sldId id="296" r:id="rId12"/>
-    <p:sldId id="298" r:id="rId13"/>
-    <p:sldId id="300" r:id="rId14"/>
-    <p:sldId id="302" r:id="rId15"/>
-    <p:sldId id="303" r:id="rId16"/>
-    <p:sldId id="304" r:id="rId17"/>
-    <p:sldId id="305" r:id="rId18"/>
-    <p:sldId id="306" r:id="rId19"/>
-    <p:sldId id="288" r:id="rId20"/>
+    <p:sldId id="308" r:id="rId8"/>
+    <p:sldId id="292" r:id="rId9"/>
+    <p:sldId id="293" r:id="rId10"/>
+    <p:sldId id="294" r:id="rId11"/>
+    <p:sldId id="295" r:id="rId12"/>
+    <p:sldId id="296" r:id="rId13"/>
+    <p:sldId id="298" r:id="rId14"/>
+    <p:sldId id="300" r:id="rId15"/>
+    <p:sldId id="302" r:id="rId16"/>
+    <p:sldId id="303" r:id="rId17"/>
+    <p:sldId id="304" r:id="rId18"/>
+    <p:sldId id="305" r:id="rId19"/>
+    <p:sldId id="306" r:id="rId20"/>
+    <p:sldId id="288" r:id="rId21"/>
   </p:sldIdLst>
   <p:sldSz cx="12192000" cy="6858000"/>
   <p:notesSz cx="6858000" cy="9144000"/>
@@ -244,7 +245,7 @@
           <a:p>
             <a:fld id="{13928E3B-7122-43E6-B3BB-09448C56C96C}" type="datetimeFigureOut">
               <a:rPr lang="en-US" smtClean="0"/>
-              <a:t>25/07/24</a:t>
+              <a:t>25/07/25</a:t>
             </a:fld>
             <a:endParaRPr lang="en-US" dirty="0"/>
           </a:p>
@@ -422,7 +423,7 @@
           <a:p>
             <a:fld id="{B98C9CAF-43DF-44BF-8016-DC193E4E594B}" type="datetimeFigureOut">
               <a:rPr lang="en-US" smtClean="0"/>
-              <a:t>25/07/24</a:t>
+              <a:t>25/07/25</a:t>
             </a:fld>
             <a:endParaRPr lang="en-US" dirty="0"/>
           </a:p>
@@ -3329,7 +3330,7 @@
           <p:cNvPr id="6" name="Picture Placeholder 5">
             <a:extLst>
               <a:ext uri="{FF2B5EF4-FFF2-40B4-BE49-F238E27FC236}">
-                <a16:creationId xmlns:a16="http://schemas.microsoft.com/office/drawing/2014/main" id="{4945466A-B743-55E4-3E5A-A33E0859162E}"/>
+                <a16:creationId xmlns:a16="http://schemas.microsoft.com/office/drawing/2014/main" id="{EED46119-72B4-1864-1C8E-C37A22608F92}"/>
               </a:ext>
             </a:extLst>
           </p:cNvPr>
@@ -3348,7 +3349,7 @@
               </a:ext>
             </a:extLst>
           </a:blip>
-          <a:srcRect l="-11111" r="-11111"/>
+          <a:srcRect t="-7129" b="-7129"/>
           <a:stretch>
             <a:fillRect/>
           </a:stretch>
@@ -3360,7 +3361,7 @@
           <p:cNvPr id="3" name="Text Placeholder 2">
             <a:extLst>
               <a:ext uri="{FF2B5EF4-FFF2-40B4-BE49-F238E27FC236}">
-                <a16:creationId xmlns:a16="http://schemas.microsoft.com/office/drawing/2014/main" id="{0403A956-5C41-7B3C-E2F5-26CA6B92F207}"/>
+                <a16:creationId xmlns:a16="http://schemas.microsoft.com/office/drawing/2014/main" id="{3711454B-464A-AE8B-6C68-DA913A4665E1}"/>
               </a:ext>
             </a:extLst>
           </p:cNvPr>
@@ -3378,7 +3379,7 @@
           <a:p>
             <a:r>
               <a:rPr lang="en-US" dirty="0"/>
-              <a:t>Nontechnical Duties of a Software Architect</a:t>
+              <a:t>Technical Duties of a Software Architect continued</a:t>
             </a:r>
           </a:p>
         </p:txBody>
@@ -3388,7 +3389,7 @@
           <p:cNvPr id="4" name="Slide Number Placeholder 3">
             <a:extLst>
               <a:ext uri="{FF2B5EF4-FFF2-40B4-BE49-F238E27FC236}">
-                <a16:creationId xmlns:a16="http://schemas.microsoft.com/office/drawing/2014/main" id="{A7752512-23A2-1DDC-98FC-40C1C690CE68}"/>
+                <a16:creationId xmlns:a16="http://schemas.microsoft.com/office/drawing/2014/main" id="{D36A2AE4-43C3-6E92-E8EC-579186B112CB}"/>
               </a:ext>
             </a:extLst>
           </p:cNvPr>
@@ -3416,7 +3417,7 @@
     </p:spTree>
     <p:extLst>
       <p:ext uri="{BB962C8B-B14F-4D97-AF65-F5344CB8AC3E}">
-        <p14:creationId xmlns:p14="http://schemas.microsoft.com/office/powerpoint/2010/main" val="4067655289"/>
+        <p14:creationId xmlns:p14="http://schemas.microsoft.com/office/powerpoint/2010/main" val="2609777553"/>
       </p:ext>
     </p:extLst>
   </p:cSld>
@@ -3448,7 +3449,7 @@
           <p:cNvPr id="6" name="Picture Placeholder 5">
             <a:extLst>
               <a:ext uri="{FF2B5EF4-FFF2-40B4-BE49-F238E27FC236}">
-                <a16:creationId xmlns:a16="http://schemas.microsoft.com/office/drawing/2014/main" id="{5669661C-27B0-AE8F-7DE5-971CA231A7A0}"/>
+                <a16:creationId xmlns:a16="http://schemas.microsoft.com/office/drawing/2014/main" id="{4945466A-B743-55E4-3E5A-A33E0859162E}"/>
               </a:ext>
             </a:extLst>
           </p:cNvPr>
@@ -3467,7 +3468,7 @@
               </a:ext>
             </a:extLst>
           </a:blip>
-          <a:srcRect t="-32986" b="-32986"/>
+          <a:srcRect l="-11111" r="-11111"/>
           <a:stretch>
             <a:fillRect/>
           </a:stretch>
@@ -3479,7 +3480,7 @@
           <p:cNvPr id="3" name="Text Placeholder 2">
             <a:extLst>
               <a:ext uri="{FF2B5EF4-FFF2-40B4-BE49-F238E27FC236}">
-                <a16:creationId xmlns:a16="http://schemas.microsoft.com/office/drawing/2014/main" id="{2B5F9962-CF53-C9B3-1B9F-3A0E868D9CE5}"/>
+                <a16:creationId xmlns:a16="http://schemas.microsoft.com/office/drawing/2014/main" id="{0403A956-5C41-7B3C-E2F5-26CA6B92F207}"/>
               </a:ext>
             </a:extLst>
           </p:cNvPr>
@@ -3497,7 +3498,7 @@
           <a:p>
             <a:r>
               <a:rPr lang="en-US" dirty="0"/>
-              <a:t>Nontechnical Duties of a Software Architect continued</a:t>
+              <a:t>Nontechnical Duties of a Software Architect</a:t>
             </a:r>
           </a:p>
         </p:txBody>
@@ -3507,7 +3508,7 @@
           <p:cNvPr id="4" name="Slide Number Placeholder 3">
             <a:extLst>
               <a:ext uri="{FF2B5EF4-FFF2-40B4-BE49-F238E27FC236}">
-                <a16:creationId xmlns:a16="http://schemas.microsoft.com/office/drawing/2014/main" id="{2A1A8BDE-E193-6C1B-4DEB-11A7853DBFDE}"/>
+                <a16:creationId xmlns:a16="http://schemas.microsoft.com/office/drawing/2014/main" id="{A7752512-23A2-1DDC-98FC-40C1C690CE68}"/>
               </a:ext>
             </a:extLst>
           </p:cNvPr>
@@ -3535,7 +3536,7 @@
     </p:spTree>
     <p:extLst>
       <p:ext uri="{BB962C8B-B14F-4D97-AF65-F5344CB8AC3E}">
-        <p14:creationId xmlns:p14="http://schemas.microsoft.com/office/powerpoint/2010/main" val="2684062040"/>
+        <p14:creationId xmlns:p14="http://schemas.microsoft.com/office/powerpoint/2010/main" val="4067655289"/>
       </p:ext>
     </p:extLst>
   </p:cSld>
@@ -3564,10 +3565,10 @@
       </p:grpSpPr>
       <p:pic>
         <p:nvPicPr>
-          <p:cNvPr id="8" name="Picture Placeholder 7">
-            <a:extLst>
-              <a:ext uri="{FF2B5EF4-FFF2-40B4-BE49-F238E27FC236}">
-                <a16:creationId xmlns:a16="http://schemas.microsoft.com/office/drawing/2014/main" id="{ECE71B00-8575-80F4-6212-0FDFA698EFAA}"/>
+          <p:cNvPr id="6" name="Picture Placeholder 5">
+            <a:extLst>
+              <a:ext uri="{FF2B5EF4-FFF2-40B4-BE49-F238E27FC236}">
+                <a16:creationId xmlns:a16="http://schemas.microsoft.com/office/drawing/2014/main" id="{5669661C-27B0-AE8F-7DE5-971CA231A7A0}"/>
               </a:ext>
             </a:extLst>
           </p:cNvPr>
@@ -3586,7 +3587,7 @@
               </a:ext>
             </a:extLst>
           </a:blip>
-          <a:srcRect t="-10756" b="-10756"/>
+          <a:srcRect t="-32986" b="-32986"/>
           <a:stretch>
             <a:fillRect/>
           </a:stretch>
@@ -3595,18 +3596,18 @@
       </p:pic>
       <p:sp>
         <p:nvSpPr>
-          <p:cNvPr id="3" name="Content Placeholder 2">
-            <a:extLst>
-              <a:ext uri="{FF2B5EF4-FFF2-40B4-BE49-F238E27FC236}">
-                <a16:creationId xmlns:a16="http://schemas.microsoft.com/office/drawing/2014/main" id="{E93DBB7C-FBE0-5F15-11F6-9F7496F961FC}"/>
-              </a:ext>
-            </a:extLst>
-          </p:cNvPr>
-          <p:cNvSpPr>
-            <a:spLocks noGrp="1"/>
-          </p:cNvSpPr>
-          <p:nvPr>
-            <p:ph sz="half" idx="2"/>
+          <p:cNvPr id="3" name="Text Placeholder 2">
+            <a:extLst>
+              <a:ext uri="{FF2B5EF4-FFF2-40B4-BE49-F238E27FC236}">
+                <a16:creationId xmlns:a16="http://schemas.microsoft.com/office/drawing/2014/main" id="{2B5F9962-CF53-C9B3-1B9F-3A0E868D9CE5}"/>
+              </a:ext>
+            </a:extLst>
+          </p:cNvPr>
+          <p:cNvSpPr>
+            <a:spLocks noGrp="1"/>
+          </p:cNvSpPr>
+          <p:nvPr>
+            <p:ph type="body" sz="quarter" idx="12"/>
           </p:nvPr>
         </p:nvSpPr>
         <p:spPr/>
@@ -3616,85 +3617,17 @@
           <a:p>
             <a:r>
               <a:rPr lang="en-US" dirty="0"/>
-              <a:t>Given the wide range of duties enumerated, which skills does an architect need to possess?</a:t>
-            </a:r>
-          </a:p>
-          <a:p>
-            <a:r>
-              <a:rPr lang="en-US" dirty="0"/>
-              <a:t>Much has been written about the architect’s special role of leadership in a project.</a:t>
-            </a:r>
-          </a:p>
-        </p:txBody>
-      </p:sp>
-      <p:sp>
-        <p:nvSpPr>
-          <p:cNvPr id="4" name="Content Placeholder 3">
-            <a:extLst>
-              <a:ext uri="{FF2B5EF4-FFF2-40B4-BE49-F238E27FC236}">
-                <a16:creationId xmlns:a16="http://schemas.microsoft.com/office/drawing/2014/main" id="{710958A0-F2DF-5610-32FF-6F403842294B}"/>
-              </a:ext>
-            </a:extLst>
-          </p:cNvPr>
-          <p:cNvSpPr>
-            <a:spLocks noGrp="1"/>
-          </p:cNvSpPr>
-          <p:nvPr>
-            <p:ph sz="half" idx="12"/>
-          </p:nvPr>
-        </p:nvSpPr>
-        <p:spPr/>
-        <p:txBody>
-          <a:bodyPr/>
-          <a:lstStyle/>
-          <a:p>
-            <a:r>
-              <a:rPr lang="en-US" dirty="0"/>
-              <a:t>Also some certification programs emphasize nontechnical skills.</a:t>
-            </a:r>
-          </a:p>
-          <a:p>
-            <a:r>
-              <a:rPr lang="en-US" dirty="0"/>
-              <a:t>This Table enumerates the set of skills most useful to an architect.</a:t>
-            </a:r>
-          </a:p>
-        </p:txBody>
-      </p:sp>
-      <p:sp>
-        <p:nvSpPr>
-          <p:cNvPr id="5" name="Title 4">
-            <a:extLst>
-              <a:ext uri="{FF2B5EF4-FFF2-40B4-BE49-F238E27FC236}">
-                <a16:creationId xmlns:a16="http://schemas.microsoft.com/office/drawing/2014/main" id="{6EDBFAC3-84DA-ACF9-768C-EAEB88295D0E}"/>
-              </a:ext>
-            </a:extLst>
-          </p:cNvPr>
-          <p:cNvSpPr>
-            <a:spLocks noGrp="1"/>
-          </p:cNvSpPr>
-          <p:nvPr>
-            <p:ph type="title"/>
-          </p:nvPr>
-        </p:nvSpPr>
-        <p:spPr/>
-        <p:txBody>
-          <a:bodyPr/>
-          <a:lstStyle/>
-          <a:p>
-            <a:r>
-              <a:rPr lang="en-US" dirty="0"/>
-              <a:t>Skills</a:t>
-            </a:r>
-          </a:p>
-        </p:txBody>
-      </p:sp>
-      <p:sp>
-        <p:nvSpPr>
-          <p:cNvPr id="6" name="Slide Number Placeholder 5">
-            <a:extLst>
-              <a:ext uri="{FF2B5EF4-FFF2-40B4-BE49-F238E27FC236}">
-                <a16:creationId xmlns:a16="http://schemas.microsoft.com/office/drawing/2014/main" id="{89D48FD7-76BF-F284-4A99-24A230F69949}"/>
+              <a:t>Nontechnical Duties of a Software Architect continued</a:t>
+            </a:r>
+          </a:p>
+        </p:txBody>
+      </p:sp>
+      <p:sp>
+        <p:nvSpPr>
+          <p:cNvPr id="4" name="Slide Number Placeholder 3">
+            <a:extLst>
+              <a:ext uri="{FF2B5EF4-FFF2-40B4-BE49-F238E27FC236}">
+                <a16:creationId xmlns:a16="http://schemas.microsoft.com/office/drawing/2014/main" id="{2A1A8BDE-E193-6C1B-4DEB-11A7853DBFDE}"/>
               </a:ext>
             </a:extLst>
           </p:cNvPr>
@@ -3722,7 +3655,7 @@
     </p:spTree>
     <p:extLst>
       <p:ext uri="{BB962C8B-B14F-4D97-AF65-F5344CB8AC3E}">
-        <p14:creationId xmlns:p14="http://schemas.microsoft.com/office/powerpoint/2010/main" val="955138106"/>
+        <p14:creationId xmlns:p14="http://schemas.microsoft.com/office/powerpoint/2010/main" val="2684062040"/>
       </p:ext>
     </p:extLst>
   </p:cSld>
@@ -3754,7 +3687,7 @@
           <p:cNvPr id="8" name="Picture Placeholder 7">
             <a:extLst>
               <a:ext uri="{FF2B5EF4-FFF2-40B4-BE49-F238E27FC236}">
-                <a16:creationId xmlns:a16="http://schemas.microsoft.com/office/drawing/2014/main" id="{9714796F-2B1A-A2F0-E93A-00EB3DE5C32C}"/>
+                <a16:creationId xmlns:a16="http://schemas.microsoft.com/office/drawing/2014/main" id="{ECE71B00-8575-80F4-6212-0FDFA698EFAA}"/>
               </a:ext>
             </a:extLst>
           </p:cNvPr>
@@ -3773,7 +3706,7 @@
               </a:ext>
             </a:extLst>
           </a:blip>
-          <a:srcRect l="-9664" r="-9664"/>
+          <a:srcRect t="-10756" b="-10756"/>
           <a:stretch>
             <a:fillRect/>
           </a:stretch>
@@ -3782,18 +3715,18 @@
       </p:pic>
       <p:sp>
         <p:nvSpPr>
-          <p:cNvPr id="3" name="Text Placeholder 2">
-            <a:extLst>
-              <a:ext uri="{FF2B5EF4-FFF2-40B4-BE49-F238E27FC236}">
-                <a16:creationId xmlns:a16="http://schemas.microsoft.com/office/drawing/2014/main" id="{1E37ADDB-4B23-0FB0-BEFF-6577924F7165}"/>
-              </a:ext>
-            </a:extLst>
-          </p:cNvPr>
-          <p:cNvSpPr>
-            <a:spLocks noGrp="1"/>
-          </p:cNvSpPr>
-          <p:nvPr>
-            <p:ph type="body" sz="quarter" idx="12"/>
+          <p:cNvPr id="3" name="Content Placeholder 2">
+            <a:extLst>
+              <a:ext uri="{FF2B5EF4-FFF2-40B4-BE49-F238E27FC236}">
+                <a16:creationId xmlns:a16="http://schemas.microsoft.com/office/drawing/2014/main" id="{E93DBB7C-FBE0-5F15-11F6-9F7496F961FC}"/>
+              </a:ext>
+            </a:extLst>
+          </p:cNvPr>
+          <p:cNvSpPr>
+            <a:spLocks noGrp="1"/>
+          </p:cNvSpPr>
+          <p:nvPr>
+            <p:ph sz="half" idx="2"/>
           </p:nvPr>
         </p:nvSpPr>
         <p:spPr/>
@@ -3803,17 +3736,85 @@
           <a:p>
             <a:r>
               <a:rPr lang="en-US" dirty="0"/>
-              <a:t>Skills of a Software Architect continued</a:t>
-            </a:r>
-          </a:p>
-        </p:txBody>
-      </p:sp>
-      <p:sp>
-        <p:nvSpPr>
-          <p:cNvPr id="4" name="Slide Number Placeholder 3">
-            <a:extLst>
-              <a:ext uri="{FF2B5EF4-FFF2-40B4-BE49-F238E27FC236}">
-                <a16:creationId xmlns:a16="http://schemas.microsoft.com/office/drawing/2014/main" id="{F8CF071A-8C07-A8C1-44F2-B5F4BC526648}"/>
+              <a:t>Given the wide range of duties enumerated, which skills does an architect need to possess?</a:t>
+            </a:r>
+          </a:p>
+          <a:p>
+            <a:r>
+              <a:rPr lang="en-US" dirty="0"/>
+              <a:t>Much has been written about the architect’s special role of leadership in a project.</a:t>
+            </a:r>
+          </a:p>
+        </p:txBody>
+      </p:sp>
+      <p:sp>
+        <p:nvSpPr>
+          <p:cNvPr id="4" name="Content Placeholder 3">
+            <a:extLst>
+              <a:ext uri="{FF2B5EF4-FFF2-40B4-BE49-F238E27FC236}">
+                <a16:creationId xmlns:a16="http://schemas.microsoft.com/office/drawing/2014/main" id="{710958A0-F2DF-5610-32FF-6F403842294B}"/>
+              </a:ext>
+            </a:extLst>
+          </p:cNvPr>
+          <p:cNvSpPr>
+            <a:spLocks noGrp="1"/>
+          </p:cNvSpPr>
+          <p:nvPr>
+            <p:ph sz="half" idx="12"/>
+          </p:nvPr>
+        </p:nvSpPr>
+        <p:spPr/>
+        <p:txBody>
+          <a:bodyPr/>
+          <a:lstStyle/>
+          <a:p>
+            <a:r>
+              <a:rPr lang="en-US" dirty="0"/>
+              <a:t>Also some certification programs emphasize nontechnical skills.</a:t>
+            </a:r>
+          </a:p>
+          <a:p>
+            <a:r>
+              <a:rPr lang="en-US" dirty="0"/>
+              <a:t>This Table enumerates the set of skills most useful to an architect.</a:t>
+            </a:r>
+          </a:p>
+        </p:txBody>
+      </p:sp>
+      <p:sp>
+        <p:nvSpPr>
+          <p:cNvPr id="5" name="Title 4">
+            <a:extLst>
+              <a:ext uri="{FF2B5EF4-FFF2-40B4-BE49-F238E27FC236}">
+                <a16:creationId xmlns:a16="http://schemas.microsoft.com/office/drawing/2014/main" id="{6EDBFAC3-84DA-ACF9-768C-EAEB88295D0E}"/>
+              </a:ext>
+            </a:extLst>
+          </p:cNvPr>
+          <p:cNvSpPr>
+            <a:spLocks noGrp="1"/>
+          </p:cNvSpPr>
+          <p:nvPr>
+            <p:ph type="title"/>
+          </p:nvPr>
+        </p:nvSpPr>
+        <p:spPr/>
+        <p:txBody>
+          <a:bodyPr/>
+          <a:lstStyle/>
+          <a:p>
+            <a:r>
+              <a:rPr lang="en-US" dirty="0"/>
+              <a:t>Skills</a:t>
+            </a:r>
+          </a:p>
+        </p:txBody>
+      </p:sp>
+      <p:sp>
+        <p:nvSpPr>
+          <p:cNvPr id="6" name="Slide Number Placeholder 5">
+            <a:extLst>
+              <a:ext uri="{FF2B5EF4-FFF2-40B4-BE49-F238E27FC236}">
+                <a16:creationId xmlns:a16="http://schemas.microsoft.com/office/drawing/2014/main" id="{89D48FD7-76BF-F284-4A99-24A230F69949}"/>
               </a:ext>
             </a:extLst>
           </p:cNvPr>
@@ -3841,7 +3842,7 @@
     </p:spTree>
     <p:extLst>
       <p:ext uri="{BB962C8B-B14F-4D97-AF65-F5344CB8AC3E}">
-        <p14:creationId xmlns:p14="http://schemas.microsoft.com/office/powerpoint/2010/main" val="3820892009"/>
+        <p14:creationId xmlns:p14="http://schemas.microsoft.com/office/powerpoint/2010/main" val="955138106"/>
       </p:ext>
     </p:extLst>
   </p:cSld>
@@ -3873,7 +3874,7 @@
           <p:cNvPr id="8" name="Picture Placeholder 7">
             <a:extLst>
               <a:ext uri="{FF2B5EF4-FFF2-40B4-BE49-F238E27FC236}">
-                <a16:creationId xmlns:a16="http://schemas.microsoft.com/office/drawing/2014/main" id="{419C4134-C2A7-FFF0-F580-BAAF4E52173D}"/>
+                <a16:creationId xmlns:a16="http://schemas.microsoft.com/office/drawing/2014/main" id="{9714796F-2B1A-A2F0-E93A-00EB3DE5C32C}"/>
               </a:ext>
             </a:extLst>
           </p:cNvPr>
@@ -3892,7 +3893,7 @@
               </a:ext>
             </a:extLst>
           </a:blip>
-          <a:srcRect t="-28899" b="-28899"/>
+          <a:srcRect l="-9664" r="-9664"/>
           <a:stretch>
             <a:fillRect/>
           </a:stretch>
@@ -3901,18 +3902,18 @@
       </p:pic>
       <p:sp>
         <p:nvSpPr>
-          <p:cNvPr id="3" name="Content Placeholder 2">
-            <a:extLst>
-              <a:ext uri="{FF2B5EF4-FFF2-40B4-BE49-F238E27FC236}">
-                <a16:creationId xmlns:a16="http://schemas.microsoft.com/office/drawing/2014/main" id="{6308DF46-574A-7834-6985-1F588D9B515B}"/>
-              </a:ext>
-            </a:extLst>
-          </p:cNvPr>
-          <p:cNvSpPr>
-            <a:spLocks noGrp="1"/>
-          </p:cNvSpPr>
-          <p:nvPr>
-            <p:ph sz="half" idx="2"/>
+          <p:cNvPr id="3" name="Text Placeholder 2">
+            <a:extLst>
+              <a:ext uri="{FF2B5EF4-FFF2-40B4-BE49-F238E27FC236}">
+                <a16:creationId xmlns:a16="http://schemas.microsoft.com/office/drawing/2014/main" id="{1E37ADDB-4B23-0FB0-BEFF-6577924F7165}"/>
+              </a:ext>
+            </a:extLst>
+          </p:cNvPr>
+          <p:cNvSpPr>
+            <a:spLocks noGrp="1"/>
+          </p:cNvSpPr>
+          <p:nvPr>
+            <p:ph type="body" sz="quarter" idx="12"/>
           </p:nvPr>
         </p:nvSpPr>
         <p:spPr/>
@@ -3922,76 +3923,17 @@
           <a:p>
             <a:r>
               <a:rPr lang="en-US" dirty="0"/>
-              <a:t>A competent architect has an intimate familiarity with an architectural body of knowledge. </a:t>
-            </a:r>
-          </a:p>
-          <a:p>
-            <a:r>
-              <a:rPr lang="en-US" dirty="0"/>
-              <a:t>This Table gives a set of knowledge areas for an architect.</a:t>
-            </a:r>
-          </a:p>
-        </p:txBody>
-      </p:sp>
-      <p:sp>
-        <p:nvSpPr>
-          <p:cNvPr id="4" name="Content Placeholder 3">
-            <a:extLst>
-              <a:ext uri="{FF2B5EF4-FFF2-40B4-BE49-F238E27FC236}">
-                <a16:creationId xmlns:a16="http://schemas.microsoft.com/office/drawing/2014/main" id="{7BAF015F-A85A-47E1-BCF1-9FE9B08A4AEF}"/>
-              </a:ext>
-            </a:extLst>
-          </p:cNvPr>
-          <p:cNvSpPr>
-            <a:spLocks noGrp="1"/>
-          </p:cNvSpPr>
-          <p:nvPr>
-            <p:ph sz="half" idx="12"/>
-          </p:nvPr>
-        </p:nvSpPr>
-        <p:spPr/>
-        <p:txBody>
-          <a:bodyPr/>
-          <a:lstStyle/>
-          <a:p>
-            <a:endParaRPr lang="en-US"/>
-          </a:p>
-        </p:txBody>
-      </p:sp>
-      <p:sp>
-        <p:nvSpPr>
-          <p:cNvPr id="5" name="Title 4">
-            <a:extLst>
-              <a:ext uri="{FF2B5EF4-FFF2-40B4-BE49-F238E27FC236}">
-                <a16:creationId xmlns:a16="http://schemas.microsoft.com/office/drawing/2014/main" id="{713127E7-C917-C6EB-DA4B-344A64CAEB63}"/>
-              </a:ext>
-            </a:extLst>
-          </p:cNvPr>
-          <p:cNvSpPr>
-            <a:spLocks noGrp="1"/>
-          </p:cNvSpPr>
-          <p:nvPr>
-            <p:ph type="title"/>
-          </p:nvPr>
-        </p:nvSpPr>
-        <p:spPr/>
-        <p:txBody>
-          <a:bodyPr/>
-          <a:lstStyle/>
-          <a:p>
-            <a:r>
-              <a:rPr lang="en-US" dirty="0"/>
-              <a:t>Knowledge</a:t>
-            </a:r>
-          </a:p>
-        </p:txBody>
-      </p:sp>
-      <p:sp>
-        <p:nvSpPr>
-          <p:cNvPr id="6" name="Slide Number Placeholder 5">
-            <a:extLst>
-              <a:ext uri="{FF2B5EF4-FFF2-40B4-BE49-F238E27FC236}">
-                <a16:creationId xmlns:a16="http://schemas.microsoft.com/office/drawing/2014/main" id="{893ECB02-D9A8-EC88-0329-4B40E3E9CBB2}"/>
+              <a:t>Skills of a Software Architect continued</a:t>
+            </a:r>
+          </a:p>
+        </p:txBody>
+      </p:sp>
+      <p:sp>
+        <p:nvSpPr>
+          <p:cNvPr id="4" name="Slide Number Placeholder 3">
+            <a:extLst>
+              <a:ext uri="{FF2B5EF4-FFF2-40B4-BE49-F238E27FC236}">
+                <a16:creationId xmlns:a16="http://schemas.microsoft.com/office/drawing/2014/main" id="{F8CF071A-8C07-A8C1-44F2-B5F4BC526648}"/>
               </a:ext>
             </a:extLst>
           </p:cNvPr>
@@ -4019,7 +3961,7 @@
     </p:spTree>
     <p:extLst>
       <p:ext uri="{BB962C8B-B14F-4D97-AF65-F5344CB8AC3E}">
-        <p14:creationId xmlns:p14="http://schemas.microsoft.com/office/powerpoint/2010/main" val="416712206"/>
+        <p14:creationId xmlns:p14="http://schemas.microsoft.com/office/powerpoint/2010/main" val="3820892009"/>
       </p:ext>
     </p:extLst>
   </p:cSld>
@@ -4048,10 +3990,10 @@
       </p:grpSpPr>
       <p:pic>
         <p:nvPicPr>
-          <p:cNvPr id="6" name="Picture Placeholder 5">
-            <a:extLst>
-              <a:ext uri="{FF2B5EF4-FFF2-40B4-BE49-F238E27FC236}">
-                <a16:creationId xmlns:a16="http://schemas.microsoft.com/office/drawing/2014/main" id="{13C058F9-617B-A4ED-6BC4-11C4C5F02736}"/>
+          <p:cNvPr id="8" name="Picture Placeholder 7">
+            <a:extLst>
+              <a:ext uri="{FF2B5EF4-FFF2-40B4-BE49-F238E27FC236}">
+                <a16:creationId xmlns:a16="http://schemas.microsoft.com/office/drawing/2014/main" id="{419C4134-C2A7-FFF0-F580-BAAF4E52173D}"/>
               </a:ext>
             </a:extLst>
           </p:cNvPr>
@@ -4070,7 +4012,7 @@
               </a:ext>
             </a:extLst>
           </a:blip>
-          <a:srcRect l="-21085" r="-21085"/>
+          <a:srcRect t="-28899" b="-28899"/>
           <a:stretch>
             <a:fillRect/>
           </a:stretch>
@@ -4079,18 +4021,18 @@
       </p:pic>
       <p:sp>
         <p:nvSpPr>
-          <p:cNvPr id="3" name="Text Placeholder 2">
-            <a:extLst>
-              <a:ext uri="{FF2B5EF4-FFF2-40B4-BE49-F238E27FC236}">
-                <a16:creationId xmlns:a16="http://schemas.microsoft.com/office/drawing/2014/main" id="{5B42CF68-A22C-4BDE-2A4B-D9C75D4DA9F0}"/>
-              </a:ext>
-            </a:extLst>
-          </p:cNvPr>
-          <p:cNvSpPr>
-            <a:spLocks noGrp="1"/>
-          </p:cNvSpPr>
-          <p:nvPr>
-            <p:ph type="body" sz="quarter" idx="12"/>
+          <p:cNvPr id="3" name="Content Placeholder 2">
+            <a:extLst>
+              <a:ext uri="{FF2B5EF4-FFF2-40B4-BE49-F238E27FC236}">
+                <a16:creationId xmlns:a16="http://schemas.microsoft.com/office/drawing/2014/main" id="{6308DF46-574A-7834-6985-1F588D9B515B}"/>
+              </a:ext>
+            </a:extLst>
+          </p:cNvPr>
+          <p:cNvSpPr>
+            <a:spLocks noGrp="1"/>
+          </p:cNvSpPr>
+          <p:nvPr>
+            <p:ph sz="half" idx="2"/>
           </p:nvPr>
         </p:nvSpPr>
         <p:spPr/>
@@ -4100,17 +4042,76 @@
           <a:p>
             <a:r>
               <a:rPr lang="en-US" dirty="0"/>
-              <a:t>Knowledge Areas of a Software Architect continued</a:t>
-            </a:r>
-          </a:p>
-        </p:txBody>
-      </p:sp>
-      <p:sp>
-        <p:nvSpPr>
-          <p:cNvPr id="4" name="Slide Number Placeholder 3">
-            <a:extLst>
-              <a:ext uri="{FF2B5EF4-FFF2-40B4-BE49-F238E27FC236}">
-                <a16:creationId xmlns:a16="http://schemas.microsoft.com/office/drawing/2014/main" id="{5607BDDF-254C-73A4-5465-D7E1E44BAAB9}"/>
+              <a:t>A competent architect has an intimate familiarity with an architectural body of knowledge. </a:t>
+            </a:r>
+          </a:p>
+          <a:p>
+            <a:r>
+              <a:rPr lang="en-US" dirty="0"/>
+              <a:t>This Table gives a set of knowledge areas for an architect.</a:t>
+            </a:r>
+          </a:p>
+        </p:txBody>
+      </p:sp>
+      <p:sp>
+        <p:nvSpPr>
+          <p:cNvPr id="4" name="Content Placeholder 3">
+            <a:extLst>
+              <a:ext uri="{FF2B5EF4-FFF2-40B4-BE49-F238E27FC236}">
+                <a16:creationId xmlns:a16="http://schemas.microsoft.com/office/drawing/2014/main" id="{7BAF015F-A85A-47E1-BCF1-9FE9B08A4AEF}"/>
+              </a:ext>
+            </a:extLst>
+          </p:cNvPr>
+          <p:cNvSpPr>
+            <a:spLocks noGrp="1"/>
+          </p:cNvSpPr>
+          <p:nvPr>
+            <p:ph sz="half" idx="12"/>
+          </p:nvPr>
+        </p:nvSpPr>
+        <p:spPr/>
+        <p:txBody>
+          <a:bodyPr/>
+          <a:lstStyle/>
+          <a:p>
+            <a:endParaRPr lang="en-US"/>
+          </a:p>
+        </p:txBody>
+      </p:sp>
+      <p:sp>
+        <p:nvSpPr>
+          <p:cNvPr id="5" name="Title 4">
+            <a:extLst>
+              <a:ext uri="{FF2B5EF4-FFF2-40B4-BE49-F238E27FC236}">
+                <a16:creationId xmlns:a16="http://schemas.microsoft.com/office/drawing/2014/main" id="{713127E7-C917-C6EB-DA4B-344A64CAEB63}"/>
+              </a:ext>
+            </a:extLst>
+          </p:cNvPr>
+          <p:cNvSpPr>
+            <a:spLocks noGrp="1"/>
+          </p:cNvSpPr>
+          <p:nvPr>
+            <p:ph type="title"/>
+          </p:nvPr>
+        </p:nvSpPr>
+        <p:spPr/>
+        <p:txBody>
+          <a:bodyPr/>
+          <a:lstStyle/>
+          <a:p>
+            <a:r>
+              <a:rPr lang="en-US" dirty="0"/>
+              <a:t>Knowledge</a:t>
+            </a:r>
+          </a:p>
+        </p:txBody>
+      </p:sp>
+      <p:sp>
+        <p:nvSpPr>
+          <p:cNvPr id="6" name="Slide Number Placeholder 5">
+            <a:extLst>
+              <a:ext uri="{FF2B5EF4-FFF2-40B4-BE49-F238E27FC236}">
+                <a16:creationId xmlns:a16="http://schemas.microsoft.com/office/drawing/2014/main" id="{893ECB02-D9A8-EC88-0329-4B40E3E9CBB2}"/>
               </a:ext>
             </a:extLst>
           </p:cNvPr>
@@ -4138,7 +4139,7 @@
     </p:spTree>
     <p:extLst>
       <p:ext uri="{BB962C8B-B14F-4D97-AF65-F5344CB8AC3E}">
-        <p14:creationId xmlns:p14="http://schemas.microsoft.com/office/powerpoint/2010/main" val="241628441"/>
+        <p14:creationId xmlns:p14="http://schemas.microsoft.com/office/powerpoint/2010/main" val="416712206"/>
       </p:ext>
     </p:extLst>
   </p:cSld>
@@ -4165,20 +4166,51 @@
           <a:chExt cx="0" cy="0"/>
         </a:xfrm>
       </p:grpSpPr>
-      <p:sp>
-        <p:nvSpPr>
-          <p:cNvPr id="2" name="Content Placeholder 1">
-            <a:extLst>
-              <a:ext uri="{FF2B5EF4-FFF2-40B4-BE49-F238E27FC236}">
-                <a16:creationId xmlns:a16="http://schemas.microsoft.com/office/drawing/2014/main" id="{1D634F7F-00DF-16D7-1B39-B0AB0EB42F69}"/>
-              </a:ext>
-            </a:extLst>
-          </p:cNvPr>
-          <p:cNvSpPr>
-            <a:spLocks noGrp="1"/>
-          </p:cNvSpPr>
-          <p:nvPr>
-            <p:ph sz="half" idx="2"/>
+      <p:pic>
+        <p:nvPicPr>
+          <p:cNvPr id="6" name="Picture Placeholder 5">
+            <a:extLst>
+              <a:ext uri="{FF2B5EF4-FFF2-40B4-BE49-F238E27FC236}">
+                <a16:creationId xmlns:a16="http://schemas.microsoft.com/office/drawing/2014/main" id="{13C058F9-617B-A4ED-6BC4-11C4C5F02736}"/>
+              </a:ext>
+            </a:extLst>
+          </p:cNvPr>
+          <p:cNvPicPr>
+            <a:picLocks noGrp="1" noChangeAspect="1"/>
+          </p:cNvPicPr>
+          <p:nvPr>
+            <p:ph type="pic" sz="quarter" idx="11"/>
+          </p:nvPr>
+        </p:nvPicPr>
+        <p:blipFill rotWithShape="1">
+          <a:blip r:embed="rId2">
+            <a:extLst>
+              <a:ext uri="{28A0092B-C50C-407E-A947-70E740481C1C}">
+                <a14:useLocalDpi xmlns:a14="http://schemas.microsoft.com/office/drawing/2010/main" val="0"/>
+              </a:ext>
+            </a:extLst>
+          </a:blip>
+          <a:srcRect l="-21085" r="-21085"/>
+          <a:stretch>
+            <a:fillRect/>
+          </a:stretch>
+        </p:blipFill>
+        <p:spPr/>
+      </p:pic>
+      <p:sp>
+        <p:nvSpPr>
+          <p:cNvPr id="3" name="Text Placeholder 2">
+            <a:extLst>
+              <a:ext uri="{FF2B5EF4-FFF2-40B4-BE49-F238E27FC236}">
+                <a16:creationId xmlns:a16="http://schemas.microsoft.com/office/drawing/2014/main" id="{5B42CF68-A22C-4BDE-2A4B-D9C75D4DA9F0}"/>
+              </a:ext>
+            </a:extLst>
+          </p:cNvPr>
+          <p:cNvSpPr>
+            <a:spLocks noGrp="1"/>
+          </p:cNvSpPr>
+          <p:nvPr>
+            <p:ph type="body" sz="quarter" idx="12"/>
           </p:nvPr>
         </p:nvSpPr>
         <p:spPr/>
@@ -4188,59 +4220,7 @@
           <a:p>
             <a:r>
               <a:rPr lang="en-US" dirty="0"/>
-              <a:t>Organizations can either support or hinder software architects based on their internal practices and structure.</a:t>
-            </a:r>
-          </a:p>
-          <a:p>
-            <a:r>
-              <a:rPr lang="en-US" dirty="0"/>
-              <a:t>It makes sense, therefore, to ask whether a particular organization is architecturally competent and to develop instruments whose goal is measuring the architectural competence of an organization.</a:t>
-            </a:r>
-          </a:p>
-          <a:p>
-            <a:r>
-              <a:rPr lang="en-US" dirty="0"/>
-              <a:t>The </a:t>
-            </a:r>
-            <a:r>
-              <a:rPr lang="en-US" dirty="0">
-                <a:solidFill>
-                  <a:schemeClr val="accent1"/>
-                </a:solidFill>
-              </a:rPr>
-              <a:t>architectural competence of an organization </a:t>
-            </a:r>
-            <a:r>
-              <a:rPr lang="en-US" dirty="0"/>
-              <a:t>is the ability of that organization to grow, use, and sustain the skills and knowledge necessary to effectively carry out architecture-centric practices at the individual, team, and organizational levels to produce architectures with acceptable cost that lead to systems aligned with the organization’s business goals.</a:t>
-            </a:r>
-          </a:p>
-        </p:txBody>
-      </p:sp>
-      <p:sp>
-        <p:nvSpPr>
-          <p:cNvPr id="3" name="Title 2">
-            <a:extLst>
-              <a:ext uri="{FF2B5EF4-FFF2-40B4-BE49-F238E27FC236}">
-                <a16:creationId xmlns:a16="http://schemas.microsoft.com/office/drawing/2014/main" id="{00ACD5FD-C9EB-D1AE-128B-2DF54571E53A}"/>
-              </a:ext>
-            </a:extLst>
-          </p:cNvPr>
-          <p:cNvSpPr>
-            <a:spLocks noGrp="1"/>
-          </p:cNvSpPr>
-          <p:nvPr>
-            <p:ph type="title"/>
-          </p:nvPr>
-        </p:nvSpPr>
-        <p:spPr/>
-        <p:txBody>
-          <a:bodyPr/>
-          <a:lstStyle/>
-          <a:p>
-            <a:r>
-              <a:rPr lang="en-US" dirty="0"/>
-              <a:t>Organizational Architectural Competence</a:t>
+              <a:t>Knowledge Areas of a Software Architect continued</a:t>
             </a:r>
           </a:p>
         </p:txBody>
@@ -4250,15 +4230,15 @@
           <p:cNvPr id="4" name="Slide Number Placeholder 3">
             <a:extLst>
               <a:ext uri="{FF2B5EF4-FFF2-40B4-BE49-F238E27FC236}">
-                <a16:creationId xmlns:a16="http://schemas.microsoft.com/office/drawing/2014/main" id="{65E29949-D67B-5A48-6504-1481F708E9C7}"/>
-              </a:ext>
-            </a:extLst>
-          </p:cNvPr>
-          <p:cNvSpPr>
-            <a:spLocks noGrp="1"/>
-          </p:cNvSpPr>
-          <p:nvPr>
-            <p:ph type="sldNum" sz="quarter" idx="10"/>
+                <a16:creationId xmlns:a16="http://schemas.microsoft.com/office/drawing/2014/main" id="{5607BDDF-254C-73A4-5465-D7E1E44BAAB9}"/>
+              </a:ext>
+            </a:extLst>
+          </p:cNvPr>
+          <p:cNvSpPr>
+            <a:spLocks noGrp="1"/>
+          </p:cNvSpPr>
+          <p:nvPr>
+            <p:ph type="sldNum" sz="quarter" idx="13"/>
           </p:nvPr>
         </p:nvSpPr>
         <p:spPr/>
@@ -4278,7 +4258,7 @@
     </p:spTree>
     <p:extLst>
       <p:ext uri="{BB962C8B-B14F-4D97-AF65-F5344CB8AC3E}">
-        <p14:creationId xmlns:p14="http://schemas.microsoft.com/office/powerpoint/2010/main" val="3642865824"/>
+        <p14:creationId xmlns:p14="http://schemas.microsoft.com/office/powerpoint/2010/main" val="241628441"/>
       </p:ext>
     </p:extLst>
   </p:cSld>
@@ -4310,7 +4290,7 @@
           <p:cNvPr id="2" name="Content Placeholder 1">
             <a:extLst>
               <a:ext uri="{FF2B5EF4-FFF2-40B4-BE49-F238E27FC236}">
-                <a16:creationId xmlns:a16="http://schemas.microsoft.com/office/drawing/2014/main" id="{CEDD3ED8-294C-222D-9E93-A57B0D81B34C}"/>
+                <a16:creationId xmlns:a16="http://schemas.microsoft.com/office/drawing/2014/main" id="{1D634F7F-00DF-16D7-1B39-B0AB0EB42F69}"/>
               </a:ext>
             </a:extLst>
           </p:cNvPr>
@@ -4328,34 +4308,31 @@
           <a:p>
             <a:r>
               <a:rPr lang="en-US" dirty="0"/>
-              <a:t>Organizations have duties, skills, and knowledge for architecture, just like individual architects.</a:t>
-            </a:r>
-          </a:p>
-          <a:p>
-            <a:r>
-              <a:rPr lang="en-US" dirty="0"/>
-              <a:t>These are organizational duties because they are outside the control of individual architects. </a:t>
-            </a:r>
-          </a:p>
-          <a:p>
-            <a:pPr lvl="1"/>
-            <a:r>
-              <a:rPr lang="en-US" dirty="0"/>
-              <a:t>Adequately funding the architecture effort is an organizational duty.</a:t>
-            </a:r>
-          </a:p>
-          <a:p>
-            <a:pPr lvl="1"/>
-            <a:r>
-              <a:rPr lang="en-US" dirty="0"/>
-              <a:t>Effective knowledge management or human resource management as applied to architects are examples of organizational skills.</a:t>
-            </a:r>
-          </a:p>
-          <a:p>
-            <a:pPr lvl="1"/>
-            <a:r>
-              <a:rPr lang="en-US" dirty="0"/>
-              <a:t>An example of organizational knowledge is the composition of an architecture-based life-cycle model.</a:t>
+              <a:t>Organizations can either support or hinder software architects based on their internal practices and structure.</a:t>
+            </a:r>
+          </a:p>
+          <a:p>
+            <a:r>
+              <a:rPr lang="en-US" dirty="0"/>
+              <a:t>It makes sense, therefore, to ask whether a particular organization is architecturally competent and to develop instruments whose goal is measuring the architectural competence of an organization.</a:t>
+            </a:r>
+          </a:p>
+          <a:p>
+            <a:r>
+              <a:rPr lang="en-US" dirty="0"/>
+              <a:t>The </a:t>
+            </a:r>
+            <a:r>
+              <a:rPr lang="en-US" dirty="0">
+                <a:solidFill>
+                  <a:schemeClr val="accent1"/>
+                </a:solidFill>
+              </a:rPr>
+              <a:t>architectural competence of an organization </a:t>
+            </a:r>
+            <a:r>
+              <a:rPr lang="en-US" dirty="0"/>
+              <a:t>is the ability of that organization to grow, use, and sustain the skills and knowledge necessary to effectively carry out architecture-centric practices at the individual, team, and organizational levels to produce architectures with acceptable cost that lead to systems aligned with the organization’s business goals.</a:t>
             </a:r>
           </a:p>
         </p:txBody>
@@ -4365,7 +4342,7 @@
           <p:cNvPr id="3" name="Title 2">
             <a:extLst>
               <a:ext uri="{FF2B5EF4-FFF2-40B4-BE49-F238E27FC236}">
-                <a16:creationId xmlns:a16="http://schemas.microsoft.com/office/drawing/2014/main" id="{B20EAA47-C60C-C318-781E-55239B143465}"/>
+                <a16:creationId xmlns:a16="http://schemas.microsoft.com/office/drawing/2014/main" id="{00ACD5FD-C9EB-D1AE-128B-2DF54571E53A}"/>
               </a:ext>
             </a:extLst>
           </p:cNvPr>
@@ -4393,7 +4370,7 @@
           <p:cNvPr id="4" name="Slide Number Placeholder 3">
             <a:extLst>
               <a:ext uri="{FF2B5EF4-FFF2-40B4-BE49-F238E27FC236}">
-                <a16:creationId xmlns:a16="http://schemas.microsoft.com/office/drawing/2014/main" id="{82FD2E51-F1BC-1EB2-BD06-A5C2882A7FA5}"/>
+                <a16:creationId xmlns:a16="http://schemas.microsoft.com/office/drawing/2014/main" id="{65E29949-D67B-5A48-6504-1481F708E9C7}"/>
               </a:ext>
             </a:extLst>
           </p:cNvPr>
@@ -4421,7 +4398,7 @@
     </p:spTree>
     <p:extLst>
       <p:ext uri="{BB962C8B-B14F-4D97-AF65-F5344CB8AC3E}">
-        <p14:creationId xmlns:p14="http://schemas.microsoft.com/office/powerpoint/2010/main" val="3742340305"/>
+        <p14:creationId xmlns:p14="http://schemas.microsoft.com/office/powerpoint/2010/main" val="3642865824"/>
       </p:ext>
     </p:extLst>
   </p:cSld>
@@ -4453,7 +4430,7 @@
           <p:cNvPr id="2" name="Content Placeholder 1">
             <a:extLst>
               <a:ext uri="{FF2B5EF4-FFF2-40B4-BE49-F238E27FC236}">
-                <a16:creationId xmlns:a16="http://schemas.microsoft.com/office/drawing/2014/main" id="{137BB064-0575-A0D8-3A83-33D2F762D12A}"/>
+                <a16:creationId xmlns:a16="http://schemas.microsoft.com/office/drawing/2014/main" id="{CEDD3ED8-294C-222D-9E93-A57B0D81B34C}"/>
               </a:ext>
             </a:extLst>
           </p:cNvPr>
@@ -4471,93 +4448,34 @@
           <a:p>
             <a:r>
               <a:rPr lang="en-US" dirty="0"/>
-              <a:t>An organization can enhance architectural competence through thoughtful </a:t>
-            </a:r>
-            <a:r>
-              <a:rPr lang="en-US" dirty="0">
-                <a:solidFill>
-                  <a:schemeClr val="accent1"/>
-                </a:solidFill>
-              </a:rPr>
-              <a:t>personnel policies</a:t>
-            </a:r>
-            <a:r>
-              <a:rPr lang="en-US" dirty="0"/>
-              <a:t>. For example:</a:t>
+              <a:t>Organizations have duties, skills, and knowledge for architecture, just like individual architects.</a:t>
+            </a:r>
+          </a:p>
+          <a:p>
+            <a:r>
+              <a:rPr lang="en-US" dirty="0"/>
+              <a:t>These are organizational duties because they are outside the control of individual architects. </a:t>
             </a:r>
           </a:p>
           <a:p>
             <a:pPr lvl="1"/>
             <a:r>
               <a:rPr lang="en-US" dirty="0"/>
-              <a:t>Hire talented architects.</a:t>
+              <a:t>Adequately funding the architecture effort is an organizational duty.</a:t>
             </a:r>
           </a:p>
           <a:p>
             <a:pPr lvl="1"/>
             <a:r>
               <a:rPr lang="en-US" dirty="0"/>
-              <a:t>Create mentoring, training, and certification programs.</a:t>
-            </a:r>
-          </a:p>
-          <a:p>
-            <a:r>
-              <a:rPr lang="en-US" dirty="0"/>
-              <a:t>Establishing strong </a:t>
-            </a:r>
-            <a:r>
-              <a:rPr lang="en-US" dirty="0">
-                <a:solidFill>
-                  <a:schemeClr val="accent1"/>
-                </a:solidFill>
-              </a:rPr>
-              <a:t>architecture processes </a:t>
-            </a:r>
-            <a:r>
-              <a:rPr lang="en-US" dirty="0"/>
-              <a:t>supports organizational competence. For example:</a:t>
+              <a:t>Effective knowledge management or human resource management as applied to architects are examples of organizational skills.</a:t>
             </a:r>
           </a:p>
           <a:p>
             <a:pPr lvl="1"/>
             <a:r>
               <a:rPr lang="en-US" dirty="0"/>
-              <a:t>Set clear responsibilities and authority for architects. </a:t>
-            </a:r>
-          </a:p>
-          <a:p>
-            <a:pPr lvl="1"/>
-            <a:r>
-              <a:rPr lang="en-US" dirty="0"/>
-              <a:t>Create forums and review boards for architects.</a:t>
-            </a:r>
-          </a:p>
-          <a:p>
-            <a:r>
-              <a:rPr lang="en-US" dirty="0">
-                <a:solidFill>
-                  <a:schemeClr val="accent1"/>
-                </a:solidFill>
-              </a:rPr>
-              <a:t>Technical infrastructure </a:t>
-            </a:r>
-            <a:r>
-              <a:rPr lang="en-US" dirty="0"/>
-              <a:t>can reinforce architecture-centered practices. For example:</a:t>
-            </a:r>
-          </a:p>
-          <a:p>
-            <a:pPr lvl="1"/>
-            <a:r>
-              <a:rPr lang="en-US" dirty="0"/>
-              <a:t>Maintain repositories for reusable architectures and design concepts.</a:t>
-            </a:r>
-          </a:p>
-          <a:p>
-            <a:pPr lvl="1"/>
-            <a:r>
-              <a:rPr lang="en-US" dirty="0"/>
-              <a:t>Provide centralized support for architecture tools and analysis.</a:t>
+              <a:t>An example of organizational knowledge is the composition of an architecture-based life-cycle model.</a:t>
             </a:r>
           </a:p>
         </p:txBody>
@@ -4567,7 +4485,7 @@
           <p:cNvPr id="3" name="Title 2">
             <a:extLst>
               <a:ext uri="{FF2B5EF4-FFF2-40B4-BE49-F238E27FC236}">
-                <a16:creationId xmlns:a16="http://schemas.microsoft.com/office/drawing/2014/main" id="{752A5CDE-417A-C0A8-3C99-C3ED5BA33845}"/>
+                <a16:creationId xmlns:a16="http://schemas.microsoft.com/office/drawing/2014/main" id="{B20EAA47-C60C-C318-781E-55239B143465}"/>
               </a:ext>
             </a:extLst>
           </p:cNvPr>
@@ -4580,9 +4498,7 @@
         </p:nvSpPr>
         <p:spPr/>
         <p:txBody>
-          <a:bodyPr>
-            <a:normAutofit/>
-          </a:bodyPr>
+          <a:bodyPr/>
           <a:lstStyle/>
           <a:p>
             <a:r>
@@ -4597,7 +4513,7 @@
           <p:cNvPr id="4" name="Slide Number Placeholder 3">
             <a:extLst>
               <a:ext uri="{FF2B5EF4-FFF2-40B4-BE49-F238E27FC236}">
-                <a16:creationId xmlns:a16="http://schemas.microsoft.com/office/drawing/2014/main" id="{AD5EB62F-AE07-48FC-3C87-1B2DA7427A66}"/>
+                <a16:creationId xmlns:a16="http://schemas.microsoft.com/office/drawing/2014/main" id="{82FD2E51-F1BC-1EB2-BD06-A5C2882A7FA5}"/>
               </a:ext>
             </a:extLst>
           </p:cNvPr>
@@ -4625,7 +4541,7 @@
     </p:spTree>
     <p:extLst>
       <p:ext uri="{BB962C8B-B14F-4D97-AF65-F5344CB8AC3E}">
-        <p14:creationId xmlns:p14="http://schemas.microsoft.com/office/powerpoint/2010/main" val="3101619455"/>
+        <p14:creationId xmlns:p14="http://schemas.microsoft.com/office/powerpoint/2010/main" val="3742340305"/>
       </p:ext>
     </p:extLst>
   </p:cSld>
@@ -4657,7 +4573,7 @@
           <p:cNvPr id="2" name="Content Placeholder 1">
             <a:extLst>
               <a:ext uri="{FF2B5EF4-FFF2-40B4-BE49-F238E27FC236}">
-                <a16:creationId xmlns:a16="http://schemas.microsoft.com/office/drawing/2014/main" id="{3543395B-83AC-1F94-18DA-0B61100CDBBF}"/>
+                <a16:creationId xmlns:a16="http://schemas.microsoft.com/office/drawing/2014/main" id="{137BB064-0575-A0D8-3A83-33D2F762D12A}"/>
               </a:ext>
             </a:extLst>
           </p:cNvPr>
@@ -4675,19 +4591,93 @@
           <a:p>
             <a:r>
               <a:rPr lang="en-US" dirty="0"/>
-              <a:t>In the same way that an architecture is much more than a technical “blueprint” for a system, an architect is much more than a designer of an architecture.</a:t>
-            </a:r>
-          </a:p>
-          <a:p>
-            <a:r>
-              <a:rPr lang="en-US" dirty="0"/>
-              <a:t>This has led us to try to understand what an architect and an architecture-centric organization must do to succeed.</a:t>
-            </a:r>
-          </a:p>
-          <a:p>
-            <a:r>
-              <a:rPr lang="en-US" dirty="0"/>
-              <a:t> An architect must carry out the duties, hone the skills, and continuously acquire the knowledge necessary to be successful. The key to becoming a good and then a better architect is continuous learning, mentoring, and being mentored.</a:t>
+              <a:t>An organization can enhance architectural competence through thoughtful </a:t>
+            </a:r>
+            <a:r>
+              <a:rPr lang="en-US" dirty="0">
+                <a:solidFill>
+                  <a:schemeClr val="accent1"/>
+                </a:solidFill>
+              </a:rPr>
+              <a:t>personnel policies</a:t>
+            </a:r>
+            <a:r>
+              <a:rPr lang="en-US" dirty="0"/>
+              <a:t>. For example:</a:t>
+            </a:r>
+          </a:p>
+          <a:p>
+            <a:pPr lvl="1"/>
+            <a:r>
+              <a:rPr lang="en-US" dirty="0"/>
+              <a:t>Hire talented architects.</a:t>
+            </a:r>
+          </a:p>
+          <a:p>
+            <a:pPr lvl="1"/>
+            <a:r>
+              <a:rPr lang="en-US" dirty="0"/>
+              <a:t>Create mentoring, training, and certification programs.</a:t>
+            </a:r>
+          </a:p>
+          <a:p>
+            <a:r>
+              <a:rPr lang="en-US" dirty="0"/>
+              <a:t>Establishing strong </a:t>
+            </a:r>
+            <a:r>
+              <a:rPr lang="en-US" dirty="0">
+                <a:solidFill>
+                  <a:schemeClr val="accent1"/>
+                </a:solidFill>
+              </a:rPr>
+              <a:t>architecture processes </a:t>
+            </a:r>
+            <a:r>
+              <a:rPr lang="en-US" dirty="0"/>
+              <a:t>supports organizational competence. For example:</a:t>
+            </a:r>
+          </a:p>
+          <a:p>
+            <a:pPr lvl="1"/>
+            <a:r>
+              <a:rPr lang="en-US" dirty="0"/>
+              <a:t>Set clear responsibilities and authority for architects. </a:t>
+            </a:r>
+          </a:p>
+          <a:p>
+            <a:pPr lvl="1"/>
+            <a:r>
+              <a:rPr lang="en-US" dirty="0"/>
+              <a:t>Create forums and review boards for architects.</a:t>
+            </a:r>
+          </a:p>
+          <a:p>
+            <a:r>
+              <a:rPr lang="en-US" dirty="0">
+                <a:solidFill>
+                  <a:schemeClr val="accent1"/>
+                </a:solidFill>
+              </a:rPr>
+              <a:t>Technical infrastructure </a:t>
+            </a:r>
+            <a:r>
+              <a:rPr lang="en-US" dirty="0"/>
+              <a:t>can reinforce architecture-centered practices. For example:</a:t>
+            </a:r>
+          </a:p>
+          <a:p>
+            <a:pPr lvl="1"/>
+            <a:r>
+              <a:rPr lang="en-US" dirty="0"/>
+              <a:t>Maintain repositories for reusable architectures and design concepts.</a:t>
+            </a:r>
+          </a:p>
+          <a:p>
+            <a:pPr lvl="1"/>
+            <a:r>
+              <a:rPr lang="en-US" dirty="0"/>
+              <a:t>Provide centralized support for architecture tools and analysis.</a:t>
             </a:r>
           </a:p>
         </p:txBody>
@@ -4697,7 +4687,7 @@
           <p:cNvPr id="3" name="Title 2">
             <a:extLst>
               <a:ext uri="{FF2B5EF4-FFF2-40B4-BE49-F238E27FC236}">
-                <a16:creationId xmlns:a16="http://schemas.microsoft.com/office/drawing/2014/main" id="{1AC99B89-B1A7-A64A-ECF6-7E4E4B33669A}"/>
+                <a16:creationId xmlns:a16="http://schemas.microsoft.com/office/drawing/2014/main" id="{752A5CDE-417A-C0A8-3C99-C3ED5BA33845}"/>
               </a:ext>
             </a:extLst>
           </p:cNvPr>
@@ -4710,12 +4700,14 @@
         </p:nvSpPr>
         <p:spPr/>
         <p:txBody>
-          <a:bodyPr/>
+          <a:bodyPr>
+            <a:normAutofit/>
+          </a:bodyPr>
           <a:lstStyle/>
           <a:p>
             <a:r>
               <a:rPr lang="en-US" dirty="0"/>
-              <a:t>Summary</a:t>
+              <a:t>Organizational Architectural Competence</a:t>
             </a:r>
           </a:p>
         </p:txBody>
@@ -4725,7 +4717,7 @@
           <p:cNvPr id="4" name="Slide Number Placeholder 3">
             <a:extLst>
               <a:ext uri="{FF2B5EF4-FFF2-40B4-BE49-F238E27FC236}">
-                <a16:creationId xmlns:a16="http://schemas.microsoft.com/office/drawing/2014/main" id="{7F7C1BE7-237B-998D-7AFF-DC9089796C3D}"/>
+                <a16:creationId xmlns:a16="http://schemas.microsoft.com/office/drawing/2014/main" id="{AD5EB62F-AE07-48FC-3C87-1B2DA7427A66}"/>
               </a:ext>
             </a:extLst>
           </p:cNvPr>
@@ -4753,7 +4745,7 @@
     </p:spTree>
     <p:extLst>
       <p:ext uri="{BB962C8B-B14F-4D97-AF65-F5344CB8AC3E}">
-        <p14:creationId xmlns:p14="http://schemas.microsoft.com/office/powerpoint/2010/main" val="1491717152"/>
+        <p14:creationId xmlns:p14="http://schemas.microsoft.com/office/powerpoint/2010/main" val="3101619455"/>
       </p:ext>
     </p:extLst>
   </p:cSld>
@@ -4840,6 +4832,134 @@
     <p:extLst>
       <p:ext uri="{BB962C8B-B14F-4D97-AF65-F5344CB8AC3E}">
         <p14:creationId xmlns:p14="http://schemas.microsoft.com/office/powerpoint/2010/main" val="702636525"/>
+      </p:ext>
+    </p:extLst>
+  </p:cSld>
+  <p:clrMapOvr>
+    <a:masterClrMapping/>
+  </p:clrMapOvr>
+</p:sld>
+</file>
+
+<file path=ppt/slides/slide20.xml><?xml version="1.0" encoding="utf-8"?>
+<p:sld xmlns:a="http://schemas.openxmlformats.org/drawingml/2006/main" xmlns:r="http://schemas.openxmlformats.org/officeDocument/2006/relationships" xmlns:p="http://schemas.openxmlformats.org/presentationml/2006/main">
+  <p:cSld>
+    <p:spTree>
+      <p:nvGrpSpPr>
+        <p:cNvPr id="1" name=""/>
+        <p:cNvGrpSpPr/>
+        <p:nvPr/>
+      </p:nvGrpSpPr>
+      <p:grpSpPr>
+        <a:xfrm>
+          <a:off x="0" y="0"/>
+          <a:ext cx="0" cy="0"/>
+          <a:chOff x="0" y="0"/>
+          <a:chExt cx="0" cy="0"/>
+        </a:xfrm>
+      </p:grpSpPr>
+      <p:sp>
+        <p:nvSpPr>
+          <p:cNvPr id="2" name="Content Placeholder 1">
+            <a:extLst>
+              <a:ext uri="{FF2B5EF4-FFF2-40B4-BE49-F238E27FC236}">
+                <a16:creationId xmlns:a16="http://schemas.microsoft.com/office/drawing/2014/main" id="{3543395B-83AC-1F94-18DA-0B61100CDBBF}"/>
+              </a:ext>
+            </a:extLst>
+          </p:cNvPr>
+          <p:cNvSpPr>
+            <a:spLocks noGrp="1"/>
+          </p:cNvSpPr>
+          <p:nvPr>
+            <p:ph sz="half" idx="2"/>
+          </p:nvPr>
+        </p:nvSpPr>
+        <p:spPr/>
+        <p:txBody>
+          <a:bodyPr/>
+          <a:lstStyle/>
+          <a:p>
+            <a:r>
+              <a:rPr lang="en-US" dirty="0"/>
+              <a:t>In the same way that an architecture is much more than a technical “blueprint” for a system, an architect is much more than a designer of an architecture.</a:t>
+            </a:r>
+          </a:p>
+          <a:p>
+            <a:r>
+              <a:rPr lang="en-US" dirty="0"/>
+              <a:t>This has led us to try to understand what an architect and an architecture-centric organization must do to succeed.</a:t>
+            </a:r>
+          </a:p>
+          <a:p>
+            <a:r>
+              <a:rPr lang="en-US" dirty="0"/>
+              <a:t> An architect must carry out the duties, hone the skills, and continuously acquire the knowledge necessary to be successful. The key to becoming a good and then a better architect is continuous learning, mentoring, and being mentored.</a:t>
+            </a:r>
+          </a:p>
+        </p:txBody>
+      </p:sp>
+      <p:sp>
+        <p:nvSpPr>
+          <p:cNvPr id="3" name="Title 2">
+            <a:extLst>
+              <a:ext uri="{FF2B5EF4-FFF2-40B4-BE49-F238E27FC236}">
+                <a16:creationId xmlns:a16="http://schemas.microsoft.com/office/drawing/2014/main" id="{1AC99B89-B1A7-A64A-ECF6-7E4E4B33669A}"/>
+              </a:ext>
+            </a:extLst>
+          </p:cNvPr>
+          <p:cNvSpPr>
+            <a:spLocks noGrp="1"/>
+          </p:cNvSpPr>
+          <p:nvPr>
+            <p:ph type="title"/>
+          </p:nvPr>
+        </p:nvSpPr>
+        <p:spPr/>
+        <p:txBody>
+          <a:bodyPr/>
+          <a:lstStyle/>
+          <a:p>
+            <a:r>
+              <a:rPr lang="en-US" dirty="0"/>
+              <a:t>Summary</a:t>
+            </a:r>
+          </a:p>
+        </p:txBody>
+      </p:sp>
+      <p:sp>
+        <p:nvSpPr>
+          <p:cNvPr id="4" name="Slide Number Placeholder 3">
+            <a:extLst>
+              <a:ext uri="{FF2B5EF4-FFF2-40B4-BE49-F238E27FC236}">
+                <a16:creationId xmlns:a16="http://schemas.microsoft.com/office/drawing/2014/main" id="{7F7C1BE7-237B-998D-7AFF-DC9089796C3D}"/>
+              </a:ext>
+            </a:extLst>
+          </p:cNvPr>
+          <p:cNvSpPr>
+            <a:spLocks noGrp="1"/>
+          </p:cNvSpPr>
+          <p:nvPr>
+            <p:ph type="sldNum" sz="quarter" idx="10"/>
+          </p:nvPr>
+        </p:nvSpPr>
+        <p:spPr/>
+        <p:txBody>
+          <a:bodyPr/>
+          <a:lstStyle/>
+          <a:p>
+            <a:fld id="{AE311D09-C3D9-45E8-99CE-78E12234EEAD}" type="slidenum">
+              <a:rPr lang="en-US" smtClean="0"/>
+              <a:pPr/>
+              <a:t>20</a:t>
+            </a:fld>
+            <a:endParaRPr lang="en-US" dirty="0"/>
+          </a:p>
+        </p:txBody>
+      </p:sp>
+    </p:spTree>
+    <p:extLst>
+      <p:ext uri="{BB962C8B-B14F-4D97-AF65-F5344CB8AC3E}">
+        <p14:creationId xmlns:p14="http://schemas.microsoft.com/office/powerpoint/2010/main" val="1491717152"/>
       </p:ext>
     </p:extLst>
   </p:cSld>
@@ -5196,13 +5316,49 @@
           <a:p>
             <a:r>
               <a:rPr lang="en-US" dirty="0"/>
-              <a:t>Most of the literature about architecture concentrates on the technical aspects. But architecture is created by humans in real-world organizations—an inherently nontechnical environment. </a:t>
-            </a:r>
-          </a:p>
-          <a:p>
-            <a:r>
-              <a:rPr lang="en-US" dirty="0"/>
-              <a:t>This chapter is about the competence of both architects and organizations.</a:t>
+              <a:t>Most of the literature about architecture concentrates on the technical aspects. But architecture is created by humans in real-world organizations; an inherently nontechnical environment. </a:t>
+            </a:r>
+          </a:p>
+          <a:p>
+            <a:r>
+              <a:rPr lang="en-US" dirty="0"/>
+              <a:t>This chapter is about the </a:t>
+            </a:r>
+            <a:r>
+              <a:rPr lang="en-US" dirty="0">
+                <a:solidFill>
+                  <a:schemeClr val="accent1"/>
+                </a:solidFill>
+              </a:rPr>
+              <a:t>competence</a:t>
+            </a:r>
+            <a:r>
+              <a:rPr lang="en-US" dirty="0"/>
+              <a:t> of both </a:t>
+            </a:r>
+            <a:r>
+              <a:rPr lang="en-US" dirty="0">
+                <a:solidFill>
+                  <a:schemeClr val="accent1"/>
+                </a:solidFill>
+              </a:rPr>
+              <a:t>architects</a:t>
+            </a:r>
+            <a:r>
+              <a:rPr lang="en-US" dirty="0"/>
+              <a:t> and </a:t>
+            </a:r>
+            <a:r>
+              <a:rPr lang="en-US" dirty="0">
+                <a:solidFill>
+                  <a:schemeClr val="accent1"/>
+                </a:solidFill>
+              </a:rPr>
+              <a:t>organizations</a:t>
+            </a:r>
+            <a:r>
+              <a:rPr lang="en-US" dirty="0"/>
+              <a:t>.</a:t>
             </a:r>
           </a:p>
           <a:p>
@@ -5355,7 +5511,19 @@
             </a:pPr>
             <a:r>
               <a:rPr lang="en-US" dirty="0"/>
-              <a:t>Gain experience carrying out the duties.</a:t>
+              <a:t>Gain experience carrying out the </a:t>
+            </a:r>
+            <a:r>
+              <a:rPr lang="en-US" dirty="0">
+                <a:solidFill>
+                  <a:schemeClr val="accent1"/>
+                </a:solidFill>
+              </a:rPr>
+              <a:t>duties</a:t>
+            </a:r>
+            <a:r>
+              <a:rPr lang="en-US" dirty="0"/>
+              <a:t>.</a:t>
             </a:r>
           </a:p>
           <a:p>
@@ -5365,7 +5533,19 @@
             </a:pPr>
             <a:r>
               <a:rPr lang="en-US" dirty="0"/>
-              <a:t>Improve your nontechnical skills.</a:t>
+              <a:t>Improve your nontechnical </a:t>
+            </a:r>
+            <a:r>
+              <a:rPr lang="en-US" dirty="0">
+                <a:solidFill>
+                  <a:schemeClr val="accent1"/>
+                </a:solidFill>
+              </a:rPr>
+              <a:t>skills</a:t>
+            </a:r>
+            <a:r>
+              <a:rPr lang="en-US" dirty="0"/>
+              <a:t>.</a:t>
             </a:r>
           </a:p>
           <a:p>
@@ -5375,7 +5555,19 @@
             </a:pPr>
             <a:r>
               <a:rPr lang="en-US" dirty="0"/>
-              <a:t>Master the body of knowledge and remain up-to-date on it.</a:t>
+              <a:t>Master the body of </a:t>
+            </a:r>
+            <a:r>
+              <a:rPr lang="en-US" dirty="0">
+                <a:solidFill>
+                  <a:schemeClr val="accent1"/>
+                </a:solidFill>
+              </a:rPr>
+              <a:t>knowledge</a:t>
+            </a:r>
+            <a:r>
+              <a:rPr lang="en-US" dirty="0"/>
+              <a:t> and remain up-to-date on it.</a:t>
             </a:r>
           </a:p>
         </p:txBody>
@@ -5468,12 +5660,43 @@
           <a:chExt cx="0" cy="0"/>
         </a:xfrm>
       </p:grpSpPr>
-      <p:sp>
-        <p:nvSpPr>
-          <p:cNvPr id="2" name="Content Placeholder 1">
-            <a:extLst>
-              <a:ext uri="{FF2B5EF4-FFF2-40B4-BE49-F238E27FC236}">
-                <a16:creationId xmlns:a16="http://schemas.microsoft.com/office/drawing/2014/main" id="{CEF98C9C-D507-63AA-504D-953566C041F6}"/>
+      <p:pic>
+        <p:nvPicPr>
+          <p:cNvPr id="8" name="Picture Placeholder 7">
+            <a:extLst>
+              <a:ext uri="{FF2B5EF4-FFF2-40B4-BE49-F238E27FC236}">
+                <a16:creationId xmlns:a16="http://schemas.microsoft.com/office/drawing/2014/main" id="{56E10454-1086-9DDB-EC16-D93BDD4542BF}"/>
+              </a:ext>
+            </a:extLst>
+          </p:cNvPr>
+          <p:cNvPicPr>
+            <a:picLocks noGrp="1" noChangeAspect="1"/>
+          </p:cNvPicPr>
+          <p:nvPr>
+            <p:ph type="pic" sz="quarter" idx="11"/>
+          </p:nvPr>
+        </p:nvPicPr>
+        <p:blipFill rotWithShape="1">
+          <a:blip r:embed="rId2">
+            <a:extLst>
+              <a:ext uri="{28A0092B-C50C-407E-A947-70E740481C1C}">
+                <a14:useLocalDpi xmlns:a14="http://schemas.microsoft.com/office/drawing/2010/main" val="0"/>
+              </a:ext>
+            </a:extLst>
+          </a:blip>
+          <a:srcRect t="-13629" b="-13629"/>
+          <a:stretch>
+            <a:fillRect/>
+          </a:stretch>
+        </p:blipFill>
+        <p:spPr/>
+      </p:pic>
+      <p:sp>
+        <p:nvSpPr>
+          <p:cNvPr id="3" name="Content Placeholder 2">
+            <a:extLst>
+              <a:ext uri="{FF2B5EF4-FFF2-40B4-BE49-F238E27FC236}">
+                <a16:creationId xmlns:a16="http://schemas.microsoft.com/office/drawing/2014/main" id="{D868799C-0CE6-BB52-7E9A-F4957DC626F2}"/>
               </a:ext>
             </a:extLst>
           </p:cNvPr>
@@ -5489,33 +5712,39 @@
           <a:bodyPr/>
           <a:lstStyle/>
           <a:p>
-            <a:r>
-              <a:rPr lang="en-US" dirty="0"/>
-              <a:t>We divide these duties into technical duties and nontechnical duties. Which are shown on separate tables on next slides</a:t>
-            </a:r>
-          </a:p>
-          <a:p>
-            <a:r>
-              <a:rPr lang="en-US" dirty="0"/>
-              <a:t>The number of nontechnical duties highlights the need to develop beyond technical expertise</a:t>
-            </a:r>
-          </a:p>
-        </p:txBody>
-      </p:sp>
-      <p:sp>
-        <p:nvSpPr>
-          <p:cNvPr id="3" name="Title 2">
-            <a:extLst>
-              <a:ext uri="{FF2B5EF4-FFF2-40B4-BE49-F238E27FC236}">
-                <a16:creationId xmlns:a16="http://schemas.microsoft.com/office/drawing/2014/main" id="{D3A4B4A1-1B27-1662-324E-5BC611381C2A}"/>
-              </a:ext>
-            </a:extLst>
-          </p:cNvPr>
-          <p:cNvSpPr>
-            <a:spLocks noGrp="1"/>
-          </p:cNvSpPr>
-          <p:nvPr>
-            <p:ph type="title"/>
+            <a:endParaRPr lang="en-US" dirty="0"/>
+          </a:p>
+          <a:p>
+            <a:r>
+              <a:rPr lang="en-US" dirty="0"/>
+              <a:t>The relationship among Duties, skills, and knowledge is shown in this figure.</a:t>
+            </a:r>
+          </a:p>
+          <a:p>
+            <a:r>
+              <a:rPr lang="en-US" dirty="0"/>
+              <a:t>Skills and knowledge support the ability to perform the required duties.</a:t>
+            </a:r>
+          </a:p>
+          <a:p>
+            <a:endParaRPr lang="en-US" dirty="0"/>
+          </a:p>
+        </p:txBody>
+      </p:sp>
+      <p:sp>
+        <p:nvSpPr>
+          <p:cNvPr id="4" name="Content Placeholder 3">
+            <a:extLst>
+              <a:ext uri="{FF2B5EF4-FFF2-40B4-BE49-F238E27FC236}">
+                <a16:creationId xmlns:a16="http://schemas.microsoft.com/office/drawing/2014/main" id="{E9D1E41B-3586-91A6-8AAC-A43E1ABE9218}"/>
+              </a:ext>
+            </a:extLst>
+          </p:cNvPr>
+          <p:cNvSpPr>
+            <a:spLocks noGrp="1"/>
+          </p:cNvSpPr>
+          <p:nvPr>
+            <p:ph sz="half" idx="12"/>
           </p:nvPr>
         </p:nvSpPr>
         <p:spPr/>
@@ -5525,25 +5754,53 @@
           <a:p>
             <a:r>
               <a:rPr lang="en-US" dirty="0"/>
-              <a:t>Duties</a:t>
-            </a:r>
-          </a:p>
-        </p:txBody>
-      </p:sp>
-      <p:sp>
-        <p:nvSpPr>
-          <p:cNvPr id="4" name="Slide Number Placeholder 3">
-            <a:extLst>
-              <a:ext uri="{FF2B5EF4-FFF2-40B4-BE49-F238E27FC236}">
-                <a16:creationId xmlns:a16="http://schemas.microsoft.com/office/drawing/2014/main" id="{134549D7-A31C-64C3-ABDA-D47E4C48A0A9}"/>
-              </a:ext>
-            </a:extLst>
-          </p:cNvPr>
-          <p:cNvSpPr>
-            <a:spLocks noGrp="1"/>
-          </p:cNvSpPr>
-          <p:nvPr>
-            <p:ph type="sldNum" sz="quarter" idx="10"/>
+              <a:t>Infinitely talented architects are of no use if they cannot (for whatever reason) perform the duties required of the position; we would not say they were competent.</a:t>
+            </a:r>
+          </a:p>
+        </p:txBody>
+      </p:sp>
+      <p:sp>
+        <p:nvSpPr>
+          <p:cNvPr id="5" name="Title 4">
+            <a:extLst>
+              <a:ext uri="{FF2B5EF4-FFF2-40B4-BE49-F238E27FC236}">
+                <a16:creationId xmlns:a16="http://schemas.microsoft.com/office/drawing/2014/main" id="{E1F914B0-2215-818E-9EA2-FB1934C69C31}"/>
+              </a:ext>
+            </a:extLst>
+          </p:cNvPr>
+          <p:cNvSpPr>
+            <a:spLocks noGrp="1"/>
+          </p:cNvSpPr>
+          <p:nvPr>
+            <p:ph type="title"/>
+          </p:nvPr>
+        </p:nvSpPr>
+        <p:spPr/>
+        <p:txBody>
+          <a:bodyPr/>
+          <a:lstStyle/>
+          <a:p>
+            <a:r>
+              <a:rPr lang="en-US" dirty="0"/>
+              <a:t>Architecture Competence</a:t>
+            </a:r>
+          </a:p>
+        </p:txBody>
+      </p:sp>
+      <p:sp>
+        <p:nvSpPr>
+          <p:cNvPr id="6" name="Slide Number Placeholder 5">
+            <a:extLst>
+              <a:ext uri="{FF2B5EF4-FFF2-40B4-BE49-F238E27FC236}">
+                <a16:creationId xmlns:a16="http://schemas.microsoft.com/office/drawing/2014/main" id="{03647CF5-B13E-ADF2-12BF-400D68B54E1C}"/>
+              </a:ext>
+            </a:extLst>
+          </p:cNvPr>
+          <p:cNvSpPr>
+            <a:spLocks noGrp="1"/>
+          </p:cNvSpPr>
+          <p:nvPr>
+            <p:ph type="sldNum" sz="quarter" idx="13"/>
           </p:nvPr>
         </p:nvSpPr>
         <p:spPr/>
@@ -5563,7 +5820,7 @@
     </p:spTree>
     <p:extLst>
       <p:ext uri="{BB962C8B-B14F-4D97-AF65-F5344CB8AC3E}">
-        <p14:creationId xmlns:p14="http://schemas.microsoft.com/office/powerpoint/2010/main" val="1163238301"/>
+        <p14:creationId xmlns:p14="http://schemas.microsoft.com/office/powerpoint/2010/main" val="1603319787"/>
       </p:ext>
     </p:extLst>
   </p:cSld>
@@ -5590,51 +5847,20 @@
           <a:chExt cx="0" cy="0"/>
         </a:xfrm>
       </p:grpSpPr>
-      <p:pic>
-        <p:nvPicPr>
-          <p:cNvPr id="6" name="Picture Placeholder 5">
-            <a:extLst>
-              <a:ext uri="{FF2B5EF4-FFF2-40B4-BE49-F238E27FC236}">
-                <a16:creationId xmlns:a16="http://schemas.microsoft.com/office/drawing/2014/main" id="{AEE92988-E30C-0FA5-7F3F-F18B7F8E115F}"/>
-              </a:ext>
-            </a:extLst>
-          </p:cNvPr>
-          <p:cNvPicPr>
-            <a:picLocks noGrp="1" noChangeAspect="1"/>
-          </p:cNvPicPr>
-          <p:nvPr>
-            <p:ph type="pic" sz="quarter" idx="11"/>
-          </p:nvPr>
-        </p:nvPicPr>
-        <p:blipFill rotWithShape="1">
-          <a:blip r:embed="rId2">
-            <a:extLst>
-              <a:ext uri="{28A0092B-C50C-407E-A947-70E740481C1C}">
-                <a14:useLocalDpi xmlns:a14="http://schemas.microsoft.com/office/drawing/2010/main" val="0"/>
-              </a:ext>
-            </a:extLst>
-          </a:blip>
-          <a:srcRect l="-24218" r="-24218"/>
-          <a:stretch>
-            <a:fillRect/>
-          </a:stretch>
-        </p:blipFill>
-        <p:spPr/>
-      </p:pic>
-      <p:sp>
-        <p:nvSpPr>
-          <p:cNvPr id="3" name="Text Placeholder 2">
-            <a:extLst>
-              <a:ext uri="{FF2B5EF4-FFF2-40B4-BE49-F238E27FC236}">
-                <a16:creationId xmlns:a16="http://schemas.microsoft.com/office/drawing/2014/main" id="{7F01F8DD-518A-53BC-304D-498B001E70A6}"/>
-              </a:ext>
-            </a:extLst>
-          </p:cNvPr>
-          <p:cNvSpPr>
-            <a:spLocks noGrp="1"/>
-          </p:cNvSpPr>
-          <p:nvPr>
-            <p:ph type="body" sz="quarter" idx="12"/>
+      <p:sp>
+        <p:nvSpPr>
+          <p:cNvPr id="2" name="Content Placeholder 1">
+            <a:extLst>
+              <a:ext uri="{FF2B5EF4-FFF2-40B4-BE49-F238E27FC236}">
+                <a16:creationId xmlns:a16="http://schemas.microsoft.com/office/drawing/2014/main" id="{CEF98C9C-D507-63AA-504D-953566C041F6}"/>
+              </a:ext>
+            </a:extLst>
+          </p:cNvPr>
+          <p:cNvSpPr>
+            <a:spLocks noGrp="1"/>
+          </p:cNvSpPr>
+          <p:nvPr>
+            <p:ph sz="half" idx="2"/>
           </p:nvPr>
         </p:nvSpPr>
         <p:spPr/>
@@ -5644,7 +5870,41 @@
           <a:p>
             <a:r>
               <a:rPr lang="en-US" dirty="0"/>
-              <a:t>Technical Duties of a Software Architect</a:t>
+              <a:t>We divide these duties into technical duties and nontechnical duties. Which are shown on separate tables on next slides</a:t>
+            </a:r>
+          </a:p>
+          <a:p>
+            <a:r>
+              <a:rPr lang="en-US" dirty="0"/>
+              <a:t>The number of nontechnical duties highlights the need to develop beyond technical expertise</a:t>
+            </a:r>
+          </a:p>
+        </p:txBody>
+      </p:sp>
+      <p:sp>
+        <p:nvSpPr>
+          <p:cNvPr id="3" name="Title 2">
+            <a:extLst>
+              <a:ext uri="{FF2B5EF4-FFF2-40B4-BE49-F238E27FC236}">
+                <a16:creationId xmlns:a16="http://schemas.microsoft.com/office/drawing/2014/main" id="{D3A4B4A1-1B27-1662-324E-5BC611381C2A}"/>
+              </a:ext>
+            </a:extLst>
+          </p:cNvPr>
+          <p:cNvSpPr>
+            <a:spLocks noGrp="1"/>
+          </p:cNvSpPr>
+          <p:nvPr>
+            <p:ph type="title"/>
+          </p:nvPr>
+        </p:nvSpPr>
+        <p:spPr/>
+        <p:txBody>
+          <a:bodyPr/>
+          <a:lstStyle/>
+          <a:p>
+            <a:r>
+              <a:rPr lang="en-US" dirty="0"/>
+              <a:t>Duties</a:t>
             </a:r>
           </a:p>
         </p:txBody>
@@ -5654,15 +5914,15 @@
           <p:cNvPr id="4" name="Slide Number Placeholder 3">
             <a:extLst>
               <a:ext uri="{FF2B5EF4-FFF2-40B4-BE49-F238E27FC236}">
-                <a16:creationId xmlns:a16="http://schemas.microsoft.com/office/drawing/2014/main" id="{357FEE4A-0D86-CAA2-B434-2C4E5B38227E}"/>
-              </a:ext>
-            </a:extLst>
-          </p:cNvPr>
-          <p:cNvSpPr>
-            <a:spLocks noGrp="1"/>
-          </p:cNvSpPr>
-          <p:nvPr>
-            <p:ph type="sldNum" sz="quarter" idx="13"/>
+                <a16:creationId xmlns:a16="http://schemas.microsoft.com/office/drawing/2014/main" id="{134549D7-A31C-64C3-ABDA-D47E4C48A0A9}"/>
+              </a:ext>
+            </a:extLst>
+          </p:cNvPr>
+          <p:cNvSpPr>
+            <a:spLocks noGrp="1"/>
+          </p:cNvSpPr>
+          <p:nvPr>
+            <p:ph type="sldNum" sz="quarter" idx="10"/>
           </p:nvPr>
         </p:nvSpPr>
         <p:spPr/>
@@ -5682,7 +5942,7 @@
     </p:spTree>
     <p:extLst>
       <p:ext uri="{BB962C8B-B14F-4D97-AF65-F5344CB8AC3E}">
-        <p14:creationId xmlns:p14="http://schemas.microsoft.com/office/powerpoint/2010/main" val="3336689340"/>
+        <p14:creationId xmlns:p14="http://schemas.microsoft.com/office/powerpoint/2010/main" val="1163238301"/>
       </p:ext>
     </p:extLst>
   </p:cSld>
@@ -5714,7 +5974,7 @@
           <p:cNvPr id="6" name="Picture Placeholder 5">
             <a:extLst>
               <a:ext uri="{FF2B5EF4-FFF2-40B4-BE49-F238E27FC236}">
-                <a16:creationId xmlns:a16="http://schemas.microsoft.com/office/drawing/2014/main" id="{EED46119-72B4-1864-1C8E-C37A22608F92}"/>
+                <a16:creationId xmlns:a16="http://schemas.microsoft.com/office/drawing/2014/main" id="{AEE92988-E30C-0FA5-7F3F-F18B7F8E115F}"/>
               </a:ext>
             </a:extLst>
           </p:cNvPr>
@@ -5733,7 +5993,7 @@
               </a:ext>
             </a:extLst>
           </a:blip>
-          <a:srcRect t="-7129" b="-7129"/>
+          <a:srcRect l="-24218" r="-24218"/>
           <a:stretch>
             <a:fillRect/>
           </a:stretch>
@@ -5745,7 +6005,7 @@
           <p:cNvPr id="3" name="Text Placeholder 2">
             <a:extLst>
               <a:ext uri="{FF2B5EF4-FFF2-40B4-BE49-F238E27FC236}">
-                <a16:creationId xmlns:a16="http://schemas.microsoft.com/office/drawing/2014/main" id="{3711454B-464A-AE8B-6C68-DA913A4665E1}"/>
+                <a16:creationId xmlns:a16="http://schemas.microsoft.com/office/drawing/2014/main" id="{7F01F8DD-518A-53BC-304D-498B001E70A6}"/>
               </a:ext>
             </a:extLst>
           </p:cNvPr>
@@ -5763,7 +6023,7 @@
           <a:p>
             <a:r>
               <a:rPr lang="en-US" dirty="0"/>
-              <a:t>Technical Duties of a Software Architect continued</a:t>
+              <a:t>Technical Duties of a Software Architect</a:t>
             </a:r>
           </a:p>
         </p:txBody>
@@ -5773,7 +6033,7 @@
           <p:cNvPr id="4" name="Slide Number Placeholder 3">
             <a:extLst>
               <a:ext uri="{FF2B5EF4-FFF2-40B4-BE49-F238E27FC236}">
-                <a16:creationId xmlns:a16="http://schemas.microsoft.com/office/drawing/2014/main" id="{D36A2AE4-43C3-6E92-E8EC-579186B112CB}"/>
+                <a16:creationId xmlns:a16="http://schemas.microsoft.com/office/drawing/2014/main" id="{357FEE4A-0D86-CAA2-B434-2C4E5B38227E}"/>
               </a:ext>
             </a:extLst>
           </p:cNvPr>
@@ -5801,7 +6061,7 @@
     </p:spTree>
     <p:extLst>
       <p:ext uri="{BB962C8B-B14F-4D97-AF65-F5344CB8AC3E}">
-        <p14:creationId xmlns:p14="http://schemas.microsoft.com/office/powerpoint/2010/main" val="2609777553"/>
+        <p14:creationId xmlns:p14="http://schemas.microsoft.com/office/powerpoint/2010/main" val="3336689340"/>
       </p:ext>
     </p:extLst>
   </p:cSld>
